--- a/QuickBite_Delivery_Intelligence.pptx
+++ b/QuickBite_Delivery_Intelligence.pptx
@@ -5,30 +5,30 @@
     <p:sldMasterId id="2147483648" r:id="rId1"/>
   </p:sldMasterIdLst>
   <p:sldIdLst>
-    <p:sldId id="256" r:id="rId7"/>
-    <p:sldId id="257" r:id="rId8"/>
-    <p:sldId id="258" r:id="rId9"/>
-    <p:sldId id="259" r:id="rId10"/>
-    <p:sldId id="260" r:id="rId11"/>
-    <p:sldId id="261" r:id="rId12"/>
-    <p:sldId id="262" r:id="rId13"/>
-    <p:sldId id="263" r:id="rId14"/>
-    <p:sldId id="264" r:id="rId15"/>
-    <p:sldId id="265" r:id="rId16"/>
-    <p:sldId id="266" r:id="rId17"/>
-    <p:sldId id="267" r:id="rId18"/>
-    <p:sldId id="268" r:id="rId19"/>
-    <p:sldId id="269" r:id="rId20"/>
-    <p:sldId id="270" r:id="rId21"/>
-    <p:sldId id="271" r:id="rId22"/>
-    <p:sldId id="272" r:id="rId23"/>
-    <p:sldId id="273" r:id="rId24"/>
-    <p:sldId id="274" r:id="rId25"/>
-    <p:sldId id="275" r:id="rId26"/>
-    <p:sldId id="276" r:id="rId27"/>
-    <p:sldId id="277" r:id="rId28"/>
+    <p:sldId id="256" r:id="rId2"/>
+    <p:sldId id="257" r:id="rId3"/>
+    <p:sldId id="258" r:id="rId4"/>
+    <p:sldId id="259" r:id="rId5"/>
+    <p:sldId id="260" r:id="rId6"/>
+    <p:sldId id="261" r:id="rId7"/>
+    <p:sldId id="262" r:id="rId8"/>
+    <p:sldId id="263" r:id="rId9"/>
+    <p:sldId id="264" r:id="rId10"/>
+    <p:sldId id="265" r:id="rId11"/>
+    <p:sldId id="266" r:id="rId12"/>
+    <p:sldId id="267" r:id="rId13"/>
+    <p:sldId id="268" r:id="rId14"/>
+    <p:sldId id="269" r:id="rId15"/>
+    <p:sldId id="270" r:id="rId16"/>
+    <p:sldId id="271" r:id="rId17"/>
+    <p:sldId id="272" r:id="rId18"/>
+    <p:sldId id="273" r:id="rId19"/>
+    <p:sldId id="274" r:id="rId20"/>
+    <p:sldId id="275" r:id="rId21"/>
+    <p:sldId id="276" r:id="rId22"/>
+    <p:sldId id="277" r:id="rId23"/>
   </p:sldIdLst>
-  <p:sldSz cx="12191695" cy="6858000" type="screen4x3"/>
+  <p:sldSz cx="12192000" cy="6858000"/>
   <p:notesSz cx="6858000" cy="9144000"/>
   <p:defaultTextStyle>
     <a:defPPr>
@@ -125,6 +125,22 @@
       </a:defRPr>
     </a:lvl9pPr>
   </p:defaultTextStyle>
+  <p:extLst>
+    <p:ext uri="{EFAFB233-063F-42B5-8137-9DF3F51BA10A}">
+      <p15:sldGuideLst xmlns:p15="http://schemas.microsoft.com/office/powerpoint/2012/main">
+        <p15:guide id="1" orient="horz" pos="2160">
+          <p15:clr>
+            <a:srgbClr val="A4A3A4"/>
+          </p15:clr>
+        </p15:guide>
+        <p15:guide id="2" pos="2880">
+          <p15:clr>
+            <a:srgbClr val="A4A3A4"/>
+          </p15:clr>
+        </p15:guide>
+      </p15:sldGuideLst>
+    </p:ext>
+  </p:extLst>
 </p:presentation>
 </file>
 
@@ -166,10 +182,9 @@
           <a:lstStyle/>
           <a:p>
             <a:r>
-              <a:rPr lang="en-US" smtClean="0"/>
+              <a:rPr lang="en-US"/>
               <a:t>Click to edit Master title style</a:t>
             </a:r>
-            <a:endParaRPr lang="en-US"/>
           </a:p>
         </p:txBody>
       </p:sp>
@@ -285,10 +300,9 @@
           </a:lstStyle>
           <a:p>
             <a:r>
-              <a:rPr lang="en-US" smtClean="0"/>
+              <a:rPr lang="en-US"/>
               <a:t>Click to edit Master subtitle style</a:t>
             </a:r>
-            <a:endParaRPr lang="en-US"/>
           </a:p>
         </p:txBody>
       </p:sp>
@@ -309,7 +323,7 @@
           <a:p>
             <a:fld id="{5BCAD085-E8A6-8845-BD4E-CB4CCA059FC4}" type="datetimeFigureOut">
               <a:rPr lang="en-US" smtClean="0"/>
-              <a:t>1/27/13</a:t>
+              <a:t>6/18/2026</a:t>
             </a:fld>
             <a:endParaRPr lang="en-US"/>
           </a:p>
@@ -403,10 +417,9 @@
           <a:lstStyle/>
           <a:p>
             <a:r>
-              <a:rPr lang="en-US" smtClean="0"/>
+              <a:rPr lang="en-US"/>
               <a:t>Click to edit Master title style</a:t>
             </a:r>
-            <a:endParaRPr lang="en-US"/>
           </a:p>
         </p:txBody>
       </p:sp>
@@ -427,38 +440,37 @@
           <a:p>
             <a:pPr lvl="0"/>
             <a:r>
-              <a:rPr lang="en-US" smtClean="0"/>
+              <a:rPr lang="en-US"/>
               <a:t>Click to edit Master text styles</a:t>
             </a:r>
           </a:p>
           <a:p>
             <a:pPr lvl="1"/>
             <a:r>
-              <a:rPr lang="en-US" smtClean="0"/>
+              <a:rPr lang="en-US"/>
               <a:t>Second level</a:t>
             </a:r>
           </a:p>
           <a:p>
             <a:pPr lvl="2"/>
             <a:r>
-              <a:rPr lang="en-US" smtClean="0"/>
+              <a:rPr lang="en-US"/>
               <a:t>Third level</a:t>
             </a:r>
           </a:p>
           <a:p>
             <a:pPr lvl="3"/>
             <a:r>
-              <a:rPr lang="en-US" smtClean="0"/>
+              <a:rPr lang="en-US"/>
               <a:t>Fourth level</a:t>
             </a:r>
           </a:p>
           <a:p>
             <a:pPr lvl="4"/>
             <a:r>
-              <a:rPr lang="en-US" smtClean="0"/>
+              <a:rPr lang="en-US"/>
               <a:t>Fifth level</a:t>
             </a:r>
-            <a:endParaRPr lang="en-US"/>
           </a:p>
         </p:txBody>
       </p:sp>
@@ -479,7 +491,7 @@
           <a:p>
             <a:fld id="{5BCAD085-E8A6-8845-BD4E-CB4CCA059FC4}" type="datetimeFigureOut">
               <a:rPr lang="en-US" smtClean="0"/>
-              <a:t>1/27/13</a:t>
+              <a:t>6/18/2026</a:t>
             </a:fld>
             <a:endParaRPr lang="en-US"/>
           </a:p>
@@ -578,10 +590,9 @@
           <a:lstStyle/>
           <a:p>
             <a:r>
-              <a:rPr lang="en-US" smtClean="0"/>
+              <a:rPr lang="en-US"/>
               <a:t>Click to edit Master title style</a:t>
             </a:r>
-            <a:endParaRPr lang="en-US"/>
           </a:p>
         </p:txBody>
       </p:sp>
@@ -607,38 +618,37 @@
           <a:p>
             <a:pPr lvl="0"/>
             <a:r>
-              <a:rPr lang="en-US" smtClean="0"/>
+              <a:rPr lang="en-US"/>
               <a:t>Click to edit Master text styles</a:t>
             </a:r>
           </a:p>
           <a:p>
             <a:pPr lvl="1"/>
             <a:r>
-              <a:rPr lang="en-US" smtClean="0"/>
+              <a:rPr lang="en-US"/>
               <a:t>Second level</a:t>
             </a:r>
           </a:p>
           <a:p>
             <a:pPr lvl="2"/>
             <a:r>
-              <a:rPr lang="en-US" smtClean="0"/>
+              <a:rPr lang="en-US"/>
               <a:t>Third level</a:t>
             </a:r>
           </a:p>
           <a:p>
             <a:pPr lvl="3"/>
             <a:r>
-              <a:rPr lang="en-US" smtClean="0"/>
+              <a:rPr lang="en-US"/>
               <a:t>Fourth level</a:t>
             </a:r>
           </a:p>
           <a:p>
             <a:pPr lvl="4"/>
             <a:r>
-              <a:rPr lang="en-US" smtClean="0"/>
+              <a:rPr lang="en-US"/>
               <a:t>Fifth level</a:t>
             </a:r>
-            <a:endParaRPr lang="en-US"/>
           </a:p>
         </p:txBody>
       </p:sp>
@@ -659,7 +669,7 @@
           <a:p>
             <a:fld id="{5BCAD085-E8A6-8845-BD4E-CB4CCA059FC4}" type="datetimeFigureOut">
               <a:rPr lang="en-US" smtClean="0"/>
-              <a:t>1/27/13</a:t>
+              <a:t>6/18/2026</a:t>
             </a:fld>
             <a:endParaRPr lang="en-US"/>
           </a:p>
@@ -753,10 +763,9 @@
           <a:lstStyle/>
           <a:p>
             <a:r>
-              <a:rPr lang="en-US" smtClean="0"/>
+              <a:rPr lang="en-US"/>
               <a:t>Click to edit Master title style</a:t>
             </a:r>
-            <a:endParaRPr lang="en-US"/>
           </a:p>
         </p:txBody>
       </p:sp>
@@ -777,38 +786,37 @@
           <a:p>
             <a:pPr lvl="0"/>
             <a:r>
-              <a:rPr lang="en-US" smtClean="0"/>
+              <a:rPr lang="en-US"/>
               <a:t>Click to edit Master text styles</a:t>
             </a:r>
           </a:p>
           <a:p>
             <a:pPr lvl="1"/>
             <a:r>
-              <a:rPr lang="en-US" smtClean="0"/>
+              <a:rPr lang="en-US"/>
               <a:t>Second level</a:t>
             </a:r>
           </a:p>
           <a:p>
             <a:pPr lvl="2"/>
             <a:r>
-              <a:rPr lang="en-US" smtClean="0"/>
+              <a:rPr lang="en-US"/>
               <a:t>Third level</a:t>
             </a:r>
           </a:p>
           <a:p>
             <a:pPr lvl="3"/>
             <a:r>
-              <a:rPr lang="en-US" smtClean="0"/>
+              <a:rPr lang="en-US"/>
               <a:t>Fourth level</a:t>
             </a:r>
           </a:p>
           <a:p>
             <a:pPr lvl="4"/>
             <a:r>
-              <a:rPr lang="en-US" smtClean="0"/>
+              <a:rPr lang="en-US"/>
               <a:t>Fifth level</a:t>
             </a:r>
-            <a:endParaRPr lang="en-US"/>
           </a:p>
         </p:txBody>
       </p:sp>
@@ -829,7 +837,7 @@
           <a:p>
             <a:fld id="{5BCAD085-E8A6-8845-BD4E-CB4CCA059FC4}" type="datetimeFigureOut">
               <a:rPr lang="en-US" smtClean="0"/>
-              <a:t>1/27/13</a:t>
+              <a:t>6/18/2026</a:t>
             </a:fld>
             <a:endParaRPr lang="en-US"/>
           </a:p>
@@ -932,10 +940,9 @@
           </a:lstStyle>
           <a:p>
             <a:r>
-              <a:rPr lang="en-US" smtClean="0"/>
+              <a:rPr lang="en-US"/>
               <a:t>Click to edit Master title style</a:t>
             </a:r>
-            <a:endParaRPr lang="en-US"/>
           </a:p>
         </p:txBody>
       </p:sp>
@@ -1052,7 +1059,7 @@
           <a:p>
             <a:pPr lvl="0"/>
             <a:r>
-              <a:rPr lang="en-US" smtClean="0"/>
+              <a:rPr lang="en-US"/>
               <a:t>Click to edit Master text styles</a:t>
             </a:r>
           </a:p>
@@ -1075,7 +1082,7 @@
           <a:p>
             <a:fld id="{5BCAD085-E8A6-8845-BD4E-CB4CCA059FC4}" type="datetimeFigureOut">
               <a:rPr lang="en-US" smtClean="0"/>
-              <a:t>1/27/13</a:t>
+              <a:t>6/18/2026</a:t>
             </a:fld>
             <a:endParaRPr lang="en-US"/>
           </a:p>
@@ -1169,10 +1176,9 @@
           <a:lstStyle/>
           <a:p>
             <a:r>
-              <a:rPr lang="en-US" smtClean="0"/>
+              <a:rPr lang="en-US"/>
               <a:t>Click to edit Master title style</a:t>
             </a:r>
-            <a:endParaRPr lang="en-US"/>
           </a:p>
         </p:txBody>
       </p:sp>
@@ -1226,38 +1232,37 @@
           <a:p>
             <a:pPr lvl="0"/>
             <a:r>
-              <a:rPr lang="en-US" smtClean="0"/>
+              <a:rPr lang="en-US"/>
               <a:t>Click to edit Master text styles</a:t>
             </a:r>
           </a:p>
           <a:p>
             <a:pPr lvl="1"/>
             <a:r>
-              <a:rPr lang="en-US" smtClean="0"/>
+              <a:rPr lang="en-US"/>
               <a:t>Second level</a:t>
             </a:r>
           </a:p>
           <a:p>
             <a:pPr lvl="2"/>
             <a:r>
-              <a:rPr lang="en-US" smtClean="0"/>
+              <a:rPr lang="en-US"/>
               <a:t>Third level</a:t>
             </a:r>
           </a:p>
           <a:p>
             <a:pPr lvl="3"/>
             <a:r>
-              <a:rPr lang="en-US" smtClean="0"/>
+              <a:rPr lang="en-US"/>
               <a:t>Fourth level</a:t>
             </a:r>
           </a:p>
           <a:p>
             <a:pPr lvl="4"/>
             <a:r>
-              <a:rPr lang="en-US" smtClean="0"/>
+              <a:rPr lang="en-US"/>
               <a:t>Fifth level</a:t>
             </a:r>
-            <a:endParaRPr lang="en-US"/>
           </a:p>
         </p:txBody>
       </p:sp>
@@ -1311,38 +1316,37 @@
           <a:p>
             <a:pPr lvl="0"/>
             <a:r>
-              <a:rPr lang="en-US" smtClean="0"/>
+              <a:rPr lang="en-US"/>
               <a:t>Click to edit Master text styles</a:t>
             </a:r>
           </a:p>
           <a:p>
             <a:pPr lvl="1"/>
             <a:r>
-              <a:rPr lang="en-US" smtClean="0"/>
+              <a:rPr lang="en-US"/>
               <a:t>Second level</a:t>
             </a:r>
           </a:p>
           <a:p>
             <a:pPr lvl="2"/>
             <a:r>
-              <a:rPr lang="en-US" smtClean="0"/>
+              <a:rPr lang="en-US"/>
               <a:t>Third level</a:t>
             </a:r>
           </a:p>
           <a:p>
             <a:pPr lvl="3"/>
             <a:r>
-              <a:rPr lang="en-US" smtClean="0"/>
+              <a:rPr lang="en-US"/>
               <a:t>Fourth level</a:t>
             </a:r>
           </a:p>
           <a:p>
             <a:pPr lvl="4"/>
             <a:r>
-              <a:rPr lang="en-US" smtClean="0"/>
+              <a:rPr lang="en-US"/>
               <a:t>Fifth level</a:t>
             </a:r>
-            <a:endParaRPr lang="en-US"/>
           </a:p>
         </p:txBody>
       </p:sp>
@@ -1363,7 +1367,7 @@
           <a:p>
             <a:fld id="{5BCAD085-E8A6-8845-BD4E-CB4CCA059FC4}" type="datetimeFigureOut">
               <a:rPr lang="en-US" smtClean="0"/>
-              <a:t>1/27/13</a:t>
+              <a:t>6/18/2026</a:t>
             </a:fld>
             <a:endParaRPr lang="en-US"/>
           </a:p>
@@ -1461,10 +1465,9 @@
           </a:lstStyle>
           <a:p>
             <a:r>
-              <a:rPr lang="en-US" smtClean="0"/>
+              <a:rPr lang="en-US"/>
               <a:t>Click to edit Master title style</a:t>
             </a:r>
-            <a:endParaRPr lang="en-US"/>
           </a:p>
         </p:txBody>
       </p:sp>
@@ -1527,7 +1530,7 @@
           <a:p>
             <a:pPr lvl="0"/>
             <a:r>
-              <a:rPr lang="en-US" smtClean="0"/>
+              <a:rPr lang="en-US"/>
               <a:t>Click to edit Master text styles</a:t>
             </a:r>
           </a:p>
@@ -1583,38 +1586,37 @@
           <a:p>
             <a:pPr lvl="0"/>
             <a:r>
-              <a:rPr lang="en-US" smtClean="0"/>
+              <a:rPr lang="en-US"/>
               <a:t>Click to edit Master text styles</a:t>
             </a:r>
           </a:p>
           <a:p>
             <a:pPr lvl="1"/>
             <a:r>
-              <a:rPr lang="en-US" smtClean="0"/>
+              <a:rPr lang="en-US"/>
               <a:t>Second level</a:t>
             </a:r>
           </a:p>
           <a:p>
             <a:pPr lvl="2"/>
             <a:r>
-              <a:rPr lang="en-US" smtClean="0"/>
+              <a:rPr lang="en-US"/>
               <a:t>Third level</a:t>
             </a:r>
           </a:p>
           <a:p>
             <a:pPr lvl="3"/>
             <a:r>
-              <a:rPr lang="en-US" smtClean="0"/>
+              <a:rPr lang="en-US"/>
               <a:t>Fourth level</a:t>
             </a:r>
           </a:p>
           <a:p>
             <a:pPr lvl="4"/>
             <a:r>
-              <a:rPr lang="en-US" smtClean="0"/>
+              <a:rPr lang="en-US"/>
               <a:t>Fifth level</a:t>
             </a:r>
-            <a:endParaRPr lang="en-US"/>
           </a:p>
         </p:txBody>
       </p:sp>
@@ -1677,7 +1679,7 @@
           <a:p>
             <a:pPr lvl="0"/>
             <a:r>
-              <a:rPr lang="en-US" smtClean="0"/>
+              <a:rPr lang="en-US"/>
               <a:t>Click to edit Master text styles</a:t>
             </a:r>
           </a:p>
@@ -1733,38 +1735,37 @@
           <a:p>
             <a:pPr lvl="0"/>
             <a:r>
-              <a:rPr lang="en-US" smtClean="0"/>
+              <a:rPr lang="en-US"/>
               <a:t>Click to edit Master text styles</a:t>
             </a:r>
           </a:p>
           <a:p>
             <a:pPr lvl="1"/>
             <a:r>
-              <a:rPr lang="en-US" smtClean="0"/>
+              <a:rPr lang="en-US"/>
               <a:t>Second level</a:t>
             </a:r>
           </a:p>
           <a:p>
             <a:pPr lvl="2"/>
             <a:r>
-              <a:rPr lang="en-US" smtClean="0"/>
+              <a:rPr lang="en-US"/>
               <a:t>Third level</a:t>
             </a:r>
           </a:p>
           <a:p>
             <a:pPr lvl="3"/>
             <a:r>
-              <a:rPr lang="en-US" smtClean="0"/>
+              <a:rPr lang="en-US"/>
               <a:t>Fourth level</a:t>
             </a:r>
           </a:p>
           <a:p>
             <a:pPr lvl="4"/>
             <a:r>
-              <a:rPr lang="en-US" smtClean="0"/>
+              <a:rPr lang="en-US"/>
               <a:t>Fifth level</a:t>
             </a:r>
-            <a:endParaRPr lang="en-US"/>
           </a:p>
         </p:txBody>
       </p:sp>
@@ -1785,7 +1786,7 @@
           <a:p>
             <a:fld id="{5BCAD085-E8A6-8845-BD4E-CB4CCA059FC4}" type="datetimeFigureOut">
               <a:rPr lang="en-US" smtClean="0"/>
-              <a:t>1/27/13</a:t>
+              <a:t>6/18/2026</a:t>
             </a:fld>
             <a:endParaRPr lang="en-US"/>
           </a:p>
@@ -1879,10 +1880,9 @@
           <a:lstStyle/>
           <a:p>
             <a:r>
-              <a:rPr lang="en-US" smtClean="0"/>
+              <a:rPr lang="en-US"/>
               <a:t>Click to edit Master title style</a:t>
             </a:r>
-            <a:endParaRPr lang="en-US"/>
           </a:p>
         </p:txBody>
       </p:sp>
@@ -1903,7 +1903,7 @@
           <a:p>
             <a:fld id="{5BCAD085-E8A6-8845-BD4E-CB4CCA059FC4}" type="datetimeFigureOut">
               <a:rPr lang="en-US" smtClean="0"/>
-              <a:t>1/27/13</a:t>
+              <a:t>6/18/2026</a:t>
             </a:fld>
             <a:endParaRPr lang="en-US"/>
           </a:p>
@@ -1998,7 +1998,7 @@
           <a:p>
             <a:fld id="{5BCAD085-E8A6-8845-BD4E-CB4CCA059FC4}" type="datetimeFigureOut">
               <a:rPr lang="en-US" smtClean="0"/>
-              <a:t>1/27/13</a:t>
+              <a:t>6/18/2026</a:t>
             </a:fld>
             <a:endParaRPr lang="en-US"/>
           </a:p>
@@ -2101,10 +2101,9 @@
           </a:lstStyle>
           <a:p>
             <a:r>
-              <a:rPr lang="en-US" smtClean="0"/>
+              <a:rPr lang="en-US"/>
               <a:t>Click to edit Master title style</a:t>
             </a:r>
-            <a:endParaRPr lang="en-US"/>
           </a:p>
         </p:txBody>
       </p:sp>
@@ -2158,38 +2157,37 @@
           <a:p>
             <a:pPr lvl="0"/>
             <a:r>
-              <a:rPr lang="en-US" smtClean="0"/>
+              <a:rPr lang="en-US"/>
               <a:t>Click to edit Master text styles</a:t>
             </a:r>
           </a:p>
           <a:p>
             <a:pPr lvl="1"/>
             <a:r>
-              <a:rPr lang="en-US" smtClean="0"/>
+              <a:rPr lang="en-US"/>
               <a:t>Second level</a:t>
             </a:r>
           </a:p>
           <a:p>
             <a:pPr lvl="2"/>
             <a:r>
-              <a:rPr lang="en-US" smtClean="0"/>
+              <a:rPr lang="en-US"/>
               <a:t>Third level</a:t>
             </a:r>
           </a:p>
           <a:p>
             <a:pPr lvl="3"/>
             <a:r>
-              <a:rPr lang="en-US" smtClean="0"/>
+              <a:rPr lang="en-US"/>
               <a:t>Fourth level</a:t>
             </a:r>
           </a:p>
           <a:p>
             <a:pPr lvl="4"/>
             <a:r>
-              <a:rPr lang="en-US" smtClean="0"/>
+              <a:rPr lang="en-US"/>
               <a:t>Fifth level</a:t>
             </a:r>
-            <a:endParaRPr lang="en-US"/>
           </a:p>
         </p:txBody>
       </p:sp>
@@ -2252,7 +2250,7 @@
           <a:p>
             <a:pPr lvl="0"/>
             <a:r>
-              <a:rPr lang="en-US" smtClean="0"/>
+              <a:rPr lang="en-US"/>
               <a:t>Click to edit Master text styles</a:t>
             </a:r>
           </a:p>
@@ -2275,7 +2273,7 @@
           <a:p>
             <a:fld id="{5BCAD085-E8A6-8845-BD4E-CB4CCA059FC4}" type="datetimeFigureOut">
               <a:rPr lang="en-US" smtClean="0"/>
-              <a:t>1/27/13</a:t>
+              <a:t>6/18/2026</a:t>
             </a:fld>
             <a:endParaRPr lang="en-US"/>
           </a:p>
@@ -2378,10 +2376,9 @@
           </a:lstStyle>
           <a:p>
             <a:r>
-              <a:rPr lang="en-US" smtClean="0"/>
+              <a:rPr lang="en-US"/>
               <a:t>Click to edit Master title style</a:t>
             </a:r>
-            <a:endParaRPr lang="en-US"/>
           </a:p>
         </p:txBody>
       </p:sp>
@@ -2505,7 +2502,7 @@
           <a:p>
             <a:pPr lvl="0"/>
             <a:r>
-              <a:rPr lang="en-US" smtClean="0"/>
+              <a:rPr lang="en-US"/>
               <a:t>Click to edit Master text styles</a:t>
             </a:r>
           </a:p>
@@ -2528,7 +2525,7 @@
           <a:p>
             <a:fld id="{5BCAD085-E8A6-8845-BD4E-CB4CCA059FC4}" type="datetimeFigureOut">
               <a:rPr lang="en-US" smtClean="0"/>
-              <a:t>1/27/13</a:t>
+              <a:t>6/18/2026</a:t>
             </a:fld>
             <a:endParaRPr lang="en-US"/>
           </a:p>
@@ -2637,10 +2634,9 @@
           <a:lstStyle/>
           <a:p>
             <a:r>
-              <a:rPr lang="en-US" smtClean="0"/>
+              <a:rPr lang="en-US"/>
               <a:t>Click to edit Master title style</a:t>
             </a:r>
-            <a:endParaRPr lang="en-US"/>
           </a:p>
         </p:txBody>
       </p:sp>
@@ -2671,38 +2667,37 @@
           <a:p>
             <a:pPr lvl="0"/>
             <a:r>
-              <a:rPr lang="en-US" smtClean="0"/>
+              <a:rPr lang="en-US"/>
               <a:t>Click to edit Master text styles</a:t>
             </a:r>
           </a:p>
           <a:p>
             <a:pPr lvl="1"/>
             <a:r>
-              <a:rPr lang="en-US" smtClean="0"/>
+              <a:rPr lang="en-US"/>
               <a:t>Second level</a:t>
             </a:r>
           </a:p>
           <a:p>
             <a:pPr lvl="2"/>
             <a:r>
-              <a:rPr lang="en-US" smtClean="0"/>
+              <a:rPr lang="en-US"/>
               <a:t>Third level</a:t>
             </a:r>
           </a:p>
           <a:p>
             <a:pPr lvl="3"/>
             <a:r>
-              <a:rPr lang="en-US" smtClean="0"/>
+              <a:rPr lang="en-US"/>
               <a:t>Fourth level</a:t>
             </a:r>
           </a:p>
           <a:p>
             <a:pPr lvl="4"/>
             <a:r>
-              <a:rPr lang="en-US" smtClean="0"/>
+              <a:rPr lang="en-US"/>
               <a:t>Fifth level</a:t>
             </a:r>
-            <a:endParaRPr lang="en-US"/>
           </a:p>
         </p:txBody>
       </p:sp>
@@ -2741,7 +2736,7 @@
           <a:p>
             <a:fld id="{5BCAD085-E8A6-8845-BD4E-CB4CCA059FC4}" type="datetimeFigureOut">
               <a:rPr lang="en-US" smtClean="0"/>
-              <a:t>1/27/13</a:t>
+              <a:t>6/18/2026</a:t>
             </a:fld>
             <a:endParaRPr lang="en-US"/>
           </a:p>
@@ -3100,7 +3095,7 @@
 </file>
 
 <file path=ppt/slides/slide1.xml><?xml version="1.0" encoding="utf-8"?>
-<p:sld xmlns:a="http://schemas.openxmlformats.org/drawingml/2006/main" xmlns:p="http://schemas.openxmlformats.org/presentationml/2006/main" xmlns:r="http://schemas.openxmlformats.org/officeDocument/2006/relationships">
+<p:sld xmlns:a="http://schemas.openxmlformats.org/drawingml/2006/main" xmlns:r="http://schemas.openxmlformats.org/officeDocument/2006/relationships" xmlns:p="http://schemas.openxmlformats.org/presentationml/2006/main">
   <p:cSld>
     <p:bg>
       <p:bgPr>
@@ -3116,7 +3111,14 @@
         <p:cNvGrpSpPr/>
         <p:nvPr/>
       </p:nvGrpSpPr>
-      <p:grpSpPr/>
+      <p:grpSpPr>
+        <a:xfrm>
+          <a:off x="0" y="0"/>
+          <a:ext cx="0" cy="0"/>
+          <a:chOff x="0" y="0"/>
+          <a:chExt cx="0" cy="0"/>
+        </a:xfrm>
+      </p:grpSpPr>
       <p:sp>
         <p:nvSpPr>
           <p:cNvPr id="2" name="Oval 1"/>
@@ -3157,6 +3159,7 @@
           <a:lstStyle/>
           <a:p>
             <a:pPr algn="ctr"/>
+            <a:endParaRPr/>
           </a:p>
         </p:txBody>
       </p:sp>
@@ -3200,6 +3203,7 @@
           <a:lstStyle/>
           <a:p>
             <a:pPr algn="ctr"/>
+            <a:endParaRPr/>
           </a:p>
         </p:txBody>
       </p:sp>
@@ -3243,6 +3247,7 @@
           <a:lstStyle/>
           <a:p>
             <a:pPr algn="ctr"/>
+            <a:endParaRPr/>
           </a:p>
         </p:txBody>
       </p:sp>
@@ -3386,7 +3391,7 @@
           </a:fontRef>
         </p:style>
         <p:txBody>
-          <a:bodyPr rtlCol="0" anchor="ctr" lIns="127000" rIns="127000" tIns="101600" bIns="101600"/>
+          <a:bodyPr lIns="127000" tIns="101600" rIns="127000" bIns="101600" rtlCol="0" anchor="ctr"/>
           <a:lstStyle/>
           <a:p>
             <a:pPr algn="ctr"/>
@@ -3450,7 +3455,7 @@
           </a:fontRef>
         </p:style>
         <p:txBody>
-          <a:bodyPr rtlCol="0" anchor="ctr" lIns="127000" rIns="127000" tIns="101600" bIns="101600"/>
+          <a:bodyPr lIns="127000" tIns="101600" rIns="127000" bIns="101600" rtlCol="0" anchor="ctr"/>
           <a:lstStyle/>
           <a:p>
             <a:pPr algn="ctr"/>
@@ -3514,7 +3519,7 @@
           </a:fontRef>
         </p:style>
         <p:txBody>
-          <a:bodyPr rtlCol="0" anchor="ctr" lIns="127000" rIns="127000" tIns="101600" bIns="101600"/>
+          <a:bodyPr lIns="127000" tIns="101600" rIns="127000" bIns="101600" rtlCol="0" anchor="ctr"/>
           <a:lstStyle/>
           <a:p>
             <a:pPr algn="ctr"/>
@@ -3578,7 +3583,7 @@
           </a:fontRef>
         </p:style>
         <p:txBody>
-          <a:bodyPr rtlCol="0" anchor="ctr" lIns="127000" rIns="127000" tIns="101600" bIns="101600"/>
+          <a:bodyPr lIns="127000" tIns="101600" rIns="127000" bIns="101600" rtlCol="0" anchor="ctr"/>
           <a:lstStyle/>
           <a:p>
             <a:pPr algn="ctr"/>
@@ -3600,40 +3605,6 @@
                 </a:solidFill>
               </a:rPr>
               <a:t>88.5%</a:t>
-            </a:r>
-          </a:p>
-        </p:txBody>
-      </p:sp>
-      <p:sp>
-        <p:nvSpPr>
-          <p:cNvPr id="12" name="TextBox 11"/>
-          <p:cNvSpPr txBox="1"/>
-          <p:nvPr/>
-        </p:nvSpPr>
-        <p:spPr>
-          <a:xfrm>
-            <a:off x="731520" y="5669280"/>
-            <a:ext cx="10972800" cy="365760"/>
-          </a:xfrm>
-          <a:prstGeom prst="rect">
-            <a:avLst/>
-          </a:prstGeom>
-          <a:noFill/>
-        </p:spPr>
-        <p:txBody>
-          <a:bodyPr wrap="square">
-            <a:spAutoFit/>
-          </a:bodyPr>
-          <a:lstStyle/>
-          <a:p>
-            <a:pPr algn="l"/>
-            <a:r>
-              <a:rPr sz="1200" b="0">
-                <a:solidFill>
-                  <a:srgbClr val="CBD5E1"/>
-                </a:solidFill>
-              </a:rPr>
-              <a:t>Prepared as a complete presentation package for academic submission.</a:t>
             </a:r>
           </a:p>
         </p:txBody>
@@ -3681,7 +3652,7 @@
 </file>
 
 <file path=ppt/slides/slide10.xml><?xml version="1.0" encoding="utf-8"?>
-<p:sld xmlns:a="http://schemas.openxmlformats.org/drawingml/2006/main" xmlns:p="http://schemas.openxmlformats.org/presentationml/2006/main" xmlns:r="http://schemas.openxmlformats.org/officeDocument/2006/relationships">
+<p:sld xmlns:a="http://schemas.openxmlformats.org/drawingml/2006/main" xmlns:r="http://schemas.openxmlformats.org/officeDocument/2006/relationships" xmlns:p="http://schemas.openxmlformats.org/presentationml/2006/main">
   <p:cSld>
     <p:bg>
       <p:bgPr>
@@ -3697,7 +3668,14 @@
         <p:cNvGrpSpPr/>
         <p:nvPr/>
       </p:nvGrpSpPr>
-      <p:grpSpPr/>
+      <p:grpSpPr>
+        <a:xfrm>
+          <a:off x="0" y="0"/>
+          <a:ext cx="0" cy="0"/>
+          <a:chOff x="0" y="0"/>
+          <a:chExt cx="0" cy="0"/>
+        </a:xfrm>
+      </p:grpSpPr>
       <p:sp>
         <p:nvSpPr>
           <p:cNvPr id="2" name="Rectangle 1"/>
@@ -3738,6 +3716,7 @@
           <a:lstStyle/>
           <a:p>
             <a:pPr algn="ctr"/>
+            <a:endParaRPr/>
           </a:p>
         </p:txBody>
       </p:sp>
@@ -3929,7 +3908,7 @@
           </a:fontRef>
         </p:style>
         <p:txBody>
-          <a:bodyPr rtlCol="0" anchor="ctr" lIns="127000" rIns="127000" tIns="101600" bIns="101600"/>
+          <a:bodyPr lIns="127000" tIns="101600" rIns="127000" bIns="101600" rtlCol="0" anchor="ctr"/>
           <a:lstStyle/>
           <a:p>
             <a:pPr algn="ctr"/>
@@ -3998,7 +3977,7 @@
 </file>
 
 <file path=ppt/slides/slide11.xml><?xml version="1.0" encoding="utf-8"?>
-<p:sld xmlns:a="http://schemas.openxmlformats.org/drawingml/2006/main" xmlns:p="http://schemas.openxmlformats.org/presentationml/2006/main" xmlns:r="http://schemas.openxmlformats.org/officeDocument/2006/relationships">
+<p:sld xmlns:a="http://schemas.openxmlformats.org/drawingml/2006/main" xmlns:r="http://schemas.openxmlformats.org/officeDocument/2006/relationships" xmlns:p="http://schemas.openxmlformats.org/presentationml/2006/main">
   <p:cSld>
     <p:bg>
       <p:bgPr>
@@ -4014,7 +3993,14 @@
         <p:cNvGrpSpPr/>
         <p:nvPr/>
       </p:nvGrpSpPr>
-      <p:grpSpPr/>
+      <p:grpSpPr>
+        <a:xfrm>
+          <a:off x="0" y="0"/>
+          <a:ext cx="0" cy="0"/>
+          <a:chOff x="0" y="0"/>
+          <a:chExt cx="0" cy="0"/>
+        </a:xfrm>
+      </p:grpSpPr>
       <p:sp>
         <p:nvSpPr>
           <p:cNvPr id="2" name="Rectangle 1"/>
@@ -4055,6 +4041,7 @@
           <a:lstStyle/>
           <a:p>
             <a:pPr algn="ctr"/>
+            <a:endParaRPr/>
           </a:p>
         </p:txBody>
       </p:sp>
@@ -4246,7 +4233,7 @@
           </a:fontRef>
         </p:style>
         <p:txBody>
-          <a:bodyPr rtlCol="0" anchor="ctr" lIns="127000" rIns="127000" tIns="101600" bIns="101600"/>
+          <a:bodyPr lIns="127000" tIns="101600" rIns="127000" bIns="101600" rtlCol="0" anchor="ctr"/>
           <a:lstStyle/>
           <a:p>
             <a:pPr algn="ctr"/>
@@ -4315,7 +4302,7 @@
 </file>
 
 <file path=ppt/slides/slide12.xml><?xml version="1.0" encoding="utf-8"?>
-<p:sld xmlns:a="http://schemas.openxmlformats.org/drawingml/2006/main" xmlns:p="http://schemas.openxmlformats.org/presentationml/2006/main" xmlns:r="http://schemas.openxmlformats.org/officeDocument/2006/relationships">
+<p:sld xmlns:a="http://schemas.openxmlformats.org/drawingml/2006/main" xmlns:r="http://schemas.openxmlformats.org/officeDocument/2006/relationships" xmlns:p="http://schemas.openxmlformats.org/presentationml/2006/main">
   <p:cSld>
     <p:bg>
       <p:bgPr>
@@ -4331,7 +4318,14 @@
         <p:cNvGrpSpPr/>
         <p:nvPr/>
       </p:nvGrpSpPr>
-      <p:grpSpPr/>
+      <p:grpSpPr>
+        <a:xfrm>
+          <a:off x="0" y="0"/>
+          <a:ext cx="0" cy="0"/>
+          <a:chOff x="0" y="0"/>
+          <a:chExt cx="0" cy="0"/>
+        </a:xfrm>
+      </p:grpSpPr>
       <p:sp>
         <p:nvSpPr>
           <p:cNvPr id="2" name="Rectangle 1"/>
@@ -4372,6 +4366,7 @@
           <a:lstStyle/>
           <a:p>
             <a:pPr algn="ctr"/>
+            <a:endParaRPr/>
           </a:p>
         </p:txBody>
       </p:sp>
@@ -4580,7 +4575,7 @@
 </file>
 
 <file path=ppt/slides/slide13.xml><?xml version="1.0" encoding="utf-8"?>
-<p:sld xmlns:a="http://schemas.openxmlformats.org/drawingml/2006/main" xmlns:p="http://schemas.openxmlformats.org/presentationml/2006/main" xmlns:r="http://schemas.openxmlformats.org/officeDocument/2006/relationships">
+<p:sld xmlns:a="http://schemas.openxmlformats.org/drawingml/2006/main" xmlns:r="http://schemas.openxmlformats.org/officeDocument/2006/relationships" xmlns:p="http://schemas.openxmlformats.org/presentationml/2006/main">
   <p:cSld>
     <p:bg>
       <p:bgPr>
@@ -4596,7 +4591,14 @@
         <p:cNvGrpSpPr/>
         <p:nvPr/>
       </p:nvGrpSpPr>
-      <p:grpSpPr/>
+      <p:grpSpPr>
+        <a:xfrm>
+          <a:off x="0" y="0"/>
+          <a:ext cx="0" cy="0"/>
+          <a:chOff x="0" y="0"/>
+          <a:chExt cx="0" cy="0"/>
+        </a:xfrm>
+      </p:grpSpPr>
       <p:sp>
         <p:nvSpPr>
           <p:cNvPr id="2" name="Rectangle 1"/>
@@ -4637,6 +4639,7 @@
           <a:lstStyle/>
           <a:p>
             <a:pPr algn="ctr"/>
+            <a:endParaRPr/>
           </a:p>
         </p:txBody>
       </p:sp>
@@ -4845,7 +4848,7 @@
 </file>
 
 <file path=ppt/slides/slide14.xml><?xml version="1.0" encoding="utf-8"?>
-<p:sld xmlns:a="http://schemas.openxmlformats.org/drawingml/2006/main" xmlns:p="http://schemas.openxmlformats.org/presentationml/2006/main" xmlns:r="http://schemas.openxmlformats.org/officeDocument/2006/relationships">
+<p:sld xmlns:a="http://schemas.openxmlformats.org/drawingml/2006/main" xmlns:r="http://schemas.openxmlformats.org/officeDocument/2006/relationships" xmlns:p="http://schemas.openxmlformats.org/presentationml/2006/main">
   <p:cSld>
     <p:bg>
       <p:bgPr>
@@ -4861,7 +4864,14 @@
         <p:cNvGrpSpPr/>
         <p:nvPr/>
       </p:nvGrpSpPr>
-      <p:grpSpPr/>
+      <p:grpSpPr>
+        <a:xfrm>
+          <a:off x="0" y="0"/>
+          <a:ext cx="0" cy="0"/>
+          <a:chOff x="0" y="0"/>
+          <a:chExt cx="0" cy="0"/>
+        </a:xfrm>
+      </p:grpSpPr>
       <p:sp>
         <p:nvSpPr>
           <p:cNvPr id="2" name="Rectangle 1"/>
@@ -4902,6 +4912,7 @@
           <a:lstStyle/>
           <a:p>
             <a:pPr algn="ctr"/>
+            <a:endParaRPr/>
           </a:p>
         </p:txBody>
       </p:sp>
@@ -5034,7 +5045,7 @@
           </a:fontRef>
         </p:style>
         <p:txBody>
-          <a:bodyPr rtlCol="0" anchor="ctr" lIns="127000" rIns="127000" tIns="101600" bIns="101600"/>
+          <a:bodyPr lIns="127000" tIns="101600" rIns="127000" bIns="101600" rtlCol="0" anchor="ctr"/>
           <a:lstStyle/>
           <a:p>
             <a:pPr algn="ctr"/>
@@ -5162,7 +5173,7 @@
 </file>
 
 <file path=ppt/slides/slide15.xml><?xml version="1.0" encoding="utf-8"?>
-<p:sld xmlns:a="http://schemas.openxmlformats.org/drawingml/2006/main" xmlns:p="http://schemas.openxmlformats.org/presentationml/2006/main" xmlns:r="http://schemas.openxmlformats.org/officeDocument/2006/relationships">
+<p:sld xmlns:a="http://schemas.openxmlformats.org/drawingml/2006/main" xmlns:r="http://schemas.openxmlformats.org/officeDocument/2006/relationships" xmlns:p="http://schemas.openxmlformats.org/presentationml/2006/main">
   <p:cSld>
     <p:bg>
       <p:bgPr>
@@ -5178,7 +5189,14 @@
         <p:cNvGrpSpPr/>
         <p:nvPr/>
       </p:nvGrpSpPr>
-      <p:grpSpPr/>
+      <p:grpSpPr>
+        <a:xfrm>
+          <a:off x="0" y="0"/>
+          <a:ext cx="0" cy="0"/>
+          <a:chOff x="0" y="0"/>
+          <a:chExt cx="0" cy="0"/>
+        </a:xfrm>
+      </p:grpSpPr>
       <p:sp>
         <p:nvSpPr>
           <p:cNvPr id="2" name="Rectangle 1"/>
@@ -5219,6 +5237,7 @@
           <a:lstStyle/>
           <a:p>
             <a:pPr algn="ctr"/>
+            <a:endParaRPr/>
           </a:p>
         </p:txBody>
       </p:sp>
@@ -5427,7 +5446,7 @@
 </file>
 
 <file path=ppt/slides/slide16.xml><?xml version="1.0" encoding="utf-8"?>
-<p:sld xmlns:a="http://schemas.openxmlformats.org/drawingml/2006/main" xmlns:p="http://schemas.openxmlformats.org/presentationml/2006/main" xmlns:r="http://schemas.openxmlformats.org/officeDocument/2006/relationships">
+<p:sld xmlns:a="http://schemas.openxmlformats.org/drawingml/2006/main" xmlns:r="http://schemas.openxmlformats.org/officeDocument/2006/relationships" xmlns:p="http://schemas.openxmlformats.org/presentationml/2006/main">
   <p:cSld>
     <p:bg>
       <p:bgPr>
@@ -5443,7 +5462,14 @@
         <p:cNvGrpSpPr/>
         <p:nvPr/>
       </p:nvGrpSpPr>
-      <p:grpSpPr/>
+      <p:grpSpPr>
+        <a:xfrm>
+          <a:off x="0" y="0"/>
+          <a:ext cx="0" cy="0"/>
+          <a:chOff x="0" y="0"/>
+          <a:chExt cx="0" cy="0"/>
+        </a:xfrm>
+      </p:grpSpPr>
       <p:sp>
         <p:nvSpPr>
           <p:cNvPr id="2" name="Rectangle 1"/>
@@ -5484,6 +5510,7 @@
           <a:lstStyle/>
           <a:p>
             <a:pPr algn="ctr"/>
+            <a:endParaRPr/>
           </a:p>
         </p:txBody>
       </p:sp>
@@ -5675,7 +5702,7 @@
           </a:fontRef>
         </p:style>
         <p:txBody>
-          <a:bodyPr rtlCol="0" anchor="ctr" lIns="127000" rIns="127000" tIns="101600" bIns="101600"/>
+          <a:bodyPr lIns="127000" tIns="101600" rIns="127000" bIns="101600" rtlCol="0" anchor="ctr"/>
           <a:lstStyle/>
           <a:p>
             <a:pPr algn="ctr"/>
@@ -5744,7 +5771,7 @@
 </file>
 
 <file path=ppt/slides/slide17.xml><?xml version="1.0" encoding="utf-8"?>
-<p:sld xmlns:a="http://schemas.openxmlformats.org/drawingml/2006/main" xmlns:p="http://schemas.openxmlformats.org/presentationml/2006/main" xmlns:r="http://schemas.openxmlformats.org/officeDocument/2006/relationships">
+<p:sld xmlns:a="http://schemas.openxmlformats.org/drawingml/2006/main" xmlns:r="http://schemas.openxmlformats.org/officeDocument/2006/relationships" xmlns:p="http://schemas.openxmlformats.org/presentationml/2006/main">
   <p:cSld>
     <p:bg>
       <p:bgPr>
@@ -5760,7 +5787,14 @@
         <p:cNvGrpSpPr/>
         <p:nvPr/>
       </p:nvGrpSpPr>
-      <p:grpSpPr/>
+      <p:grpSpPr>
+        <a:xfrm>
+          <a:off x="0" y="0"/>
+          <a:ext cx="0" cy="0"/>
+          <a:chOff x="0" y="0"/>
+          <a:chExt cx="0" cy="0"/>
+        </a:xfrm>
+      </p:grpSpPr>
       <p:sp>
         <p:nvSpPr>
           <p:cNvPr id="2" name="Rectangle 1"/>
@@ -5801,6 +5835,7 @@
           <a:lstStyle/>
           <a:p>
             <a:pPr algn="ctr"/>
+            <a:endParaRPr/>
           </a:p>
         </p:txBody>
       </p:sp>
@@ -5992,7 +6027,7 @@
           </a:fontRef>
         </p:style>
         <p:txBody>
-          <a:bodyPr rtlCol="0" anchor="ctr" lIns="127000" rIns="127000" tIns="101600" bIns="101600"/>
+          <a:bodyPr lIns="127000" tIns="101600" rIns="127000" bIns="101600" rtlCol="0" anchor="ctr"/>
           <a:lstStyle/>
           <a:p>
             <a:pPr algn="ctr"/>
@@ -6061,7 +6096,7 @@
 </file>
 
 <file path=ppt/slides/slide18.xml><?xml version="1.0" encoding="utf-8"?>
-<p:sld xmlns:a="http://schemas.openxmlformats.org/drawingml/2006/main" xmlns:p="http://schemas.openxmlformats.org/presentationml/2006/main" xmlns:r="http://schemas.openxmlformats.org/officeDocument/2006/relationships">
+<p:sld xmlns:a="http://schemas.openxmlformats.org/drawingml/2006/main" xmlns:r="http://schemas.openxmlformats.org/officeDocument/2006/relationships" xmlns:p="http://schemas.openxmlformats.org/presentationml/2006/main">
   <p:cSld>
     <p:bg>
       <p:bgPr>
@@ -6077,7 +6112,14 @@
         <p:cNvGrpSpPr/>
         <p:nvPr/>
       </p:nvGrpSpPr>
-      <p:grpSpPr/>
+      <p:grpSpPr>
+        <a:xfrm>
+          <a:off x="0" y="0"/>
+          <a:ext cx="0" cy="0"/>
+          <a:chOff x="0" y="0"/>
+          <a:chExt cx="0" cy="0"/>
+        </a:xfrm>
+      </p:grpSpPr>
       <p:sp>
         <p:nvSpPr>
           <p:cNvPr id="2" name="Rectangle 1"/>
@@ -6118,6 +6160,7 @@
           <a:lstStyle/>
           <a:p>
             <a:pPr algn="ctr"/>
+            <a:endParaRPr/>
           </a:p>
         </p:txBody>
       </p:sp>
@@ -6255,7 +6298,7 @@
 </file>
 
 <file path=ppt/slides/slide19.xml><?xml version="1.0" encoding="utf-8"?>
-<p:sld xmlns:a="http://schemas.openxmlformats.org/drawingml/2006/main" xmlns:p="http://schemas.openxmlformats.org/presentationml/2006/main" xmlns:r="http://schemas.openxmlformats.org/officeDocument/2006/relationships">
+<p:sld xmlns:a="http://schemas.openxmlformats.org/drawingml/2006/main" xmlns:r="http://schemas.openxmlformats.org/officeDocument/2006/relationships" xmlns:p="http://schemas.openxmlformats.org/presentationml/2006/main">
   <p:cSld>
     <p:bg>
       <p:bgPr>
@@ -6271,7 +6314,14 @@
         <p:cNvGrpSpPr/>
         <p:nvPr/>
       </p:nvGrpSpPr>
-      <p:grpSpPr/>
+      <p:grpSpPr>
+        <a:xfrm>
+          <a:off x="0" y="0"/>
+          <a:ext cx="0" cy="0"/>
+          <a:chOff x="0" y="0"/>
+          <a:chExt cx="0" cy="0"/>
+        </a:xfrm>
+      </p:grpSpPr>
       <p:sp>
         <p:nvSpPr>
           <p:cNvPr id="2" name="Rectangle 1"/>
@@ -6312,6 +6362,7 @@
           <a:lstStyle/>
           <a:p>
             <a:pPr algn="ctr"/>
+            <a:endParaRPr/>
           </a:p>
         </p:txBody>
       </p:sp>
@@ -6420,7 +6471,7 @@
           </a:fontRef>
         </p:style>
         <p:txBody>
-          <a:bodyPr rtlCol="0" anchor="ctr" lIns="127000" rIns="127000" tIns="101600" bIns="101600"/>
+          <a:bodyPr lIns="127000" tIns="101600" rIns="127000" bIns="101600" rtlCol="0" anchor="ctr"/>
           <a:lstStyle/>
           <a:p>
             <a:pPr algn="ctr"/>
@@ -6484,7 +6535,7 @@
           </a:fontRef>
         </p:style>
         <p:txBody>
-          <a:bodyPr rtlCol="0" anchor="ctr" lIns="127000" rIns="127000" tIns="101600" bIns="101600"/>
+          <a:bodyPr lIns="127000" tIns="101600" rIns="127000" bIns="101600" rtlCol="0" anchor="ctr"/>
           <a:lstStyle/>
           <a:p>
             <a:pPr algn="ctr"/>
@@ -6548,7 +6599,7 @@
           </a:fontRef>
         </p:style>
         <p:txBody>
-          <a:bodyPr rtlCol="0" anchor="ctr" lIns="127000" rIns="127000" tIns="101600" bIns="101600"/>
+          <a:bodyPr lIns="127000" tIns="101600" rIns="127000" bIns="101600" rtlCol="0" anchor="ctr"/>
           <a:lstStyle/>
           <a:p>
             <a:pPr algn="ctr"/>
@@ -6612,7 +6663,7 @@
           </a:fontRef>
         </p:style>
         <p:txBody>
-          <a:bodyPr rtlCol="0" anchor="ctr" lIns="127000" rIns="127000" tIns="101600" bIns="101600"/>
+          <a:bodyPr lIns="127000" tIns="101600" rIns="127000" bIns="101600" rtlCol="0" anchor="ctr"/>
           <a:lstStyle/>
           <a:p>
             <a:pPr algn="ctr"/>
@@ -6757,7 +6808,7 @@
           </a:fontRef>
         </p:style>
         <p:txBody>
-          <a:bodyPr rtlCol="0" anchor="ctr" lIns="127000" rIns="127000" tIns="101600" bIns="101600"/>
+          <a:bodyPr lIns="127000" tIns="101600" rIns="127000" bIns="101600" rtlCol="0" anchor="ctr"/>
           <a:lstStyle/>
           <a:p>
             <a:pPr algn="ctr"/>
@@ -6826,7 +6877,7 @@
 </file>
 
 <file path=ppt/slides/slide2.xml><?xml version="1.0" encoding="utf-8"?>
-<p:sld xmlns:a="http://schemas.openxmlformats.org/drawingml/2006/main" xmlns:p="http://schemas.openxmlformats.org/presentationml/2006/main" xmlns:r="http://schemas.openxmlformats.org/officeDocument/2006/relationships">
+<p:sld xmlns:a="http://schemas.openxmlformats.org/drawingml/2006/main" xmlns:r="http://schemas.openxmlformats.org/officeDocument/2006/relationships" xmlns:p="http://schemas.openxmlformats.org/presentationml/2006/main">
   <p:cSld>
     <p:bg>
       <p:bgPr>
@@ -6842,7 +6893,14 @@
         <p:cNvGrpSpPr/>
         <p:nvPr/>
       </p:nvGrpSpPr>
-      <p:grpSpPr/>
+      <p:grpSpPr>
+        <a:xfrm>
+          <a:off x="0" y="0"/>
+          <a:ext cx="0" cy="0"/>
+          <a:chOff x="0" y="0"/>
+          <a:chExt cx="0" cy="0"/>
+        </a:xfrm>
+      </p:grpSpPr>
       <p:sp>
         <p:nvSpPr>
           <p:cNvPr id="2" name="Rectangle 1"/>
@@ -6883,6 +6941,7 @@
           <a:lstStyle/>
           <a:p>
             <a:pPr algn="ctr"/>
+            <a:endParaRPr/>
           </a:p>
         </p:txBody>
       </p:sp>
@@ -6991,7 +7050,7 @@
           </a:fontRef>
         </p:style>
         <p:txBody>
-          <a:bodyPr rtlCol="0" anchor="ctr" lIns="127000" rIns="127000" tIns="101600" bIns="101600"/>
+          <a:bodyPr lIns="127000" tIns="101600" rIns="127000" bIns="101600" rtlCol="0" anchor="ctr"/>
           <a:lstStyle/>
           <a:p>
             <a:pPr algn="ctr"/>
@@ -7055,7 +7114,7 @@
           </a:fontRef>
         </p:style>
         <p:txBody>
-          <a:bodyPr rtlCol="0" anchor="ctr" lIns="127000" rIns="127000" tIns="101600" bIns="101600"/>
+          <a:bodyPr lIns="127000" tIns="101600" rIns="127000" bIns="101600" rtlCol="0" anchor="ctr"/>
           <a:lstStyle/>
           <a:p>
             <a:pPr algn="ctr"/>
@@ -7119,7 +7178,7 @@
           </a:fontRef>
         </p:style>
         <p:txBody>
-          <a:bodyPr rtlCol="0" anchor="ctr" lIns="127000" rIns="127000" tIns="101600" bIns="101600"/>
+          <a:bodyPr lIns="127000" tIns="101600" rIns="127000" bIns="101600" rtlCol="0" anchor="ctr"/>
           <a:lstStyle/>
           <a:p>
             <a:pPr algn="ctr"/>
@@ -7183,7 +7242,7 @@
           </a:fontRef>
         </p:style>
         <p:txBody>
-          <a:bodyPr rtlCol="0" anchor="ctr" lIns="127000" rIns="127000" tIns="101600" bIns="101600"/>
+          <a:bodyPr lIns="127000" tIns="101600" rIns="127000" bIns="101600" rtlCol="0" anchor="ctr"/>
           <a:lstStyle/>
           <a:p>
             <a:pPr algn="ctr"/>
@@ -7440,7 +7499,7 @@
 </file>
 
 <file path=ppt/slides/slide20.xml><?xml version="1.0" encoding="utf-8"?>
-<p:sld xmlns:a="http://schemas.openxmlformats.org/drawingml/2006/main" xmlns:p="http://schemas.openxmlformats.org/presentationml/2006/main" xmlns:r="http://schemas.openxmlformats.org/officeDocument/2006/relationships">
+<p:sld xmlns:a="http://schemas.openxmlformats.org/drawingml/2006/main" xmlns:r="http://schemas.openxmlformats.org/officeDocument/2006/relationships" xmlns:p="http://schemas.openxmlformats.org/presentationml/2006/main">
   <p:cSld>
     <p:bg>
       <p:bgPr>
@@ -7456,7 +7515,14 @@
         <p:cNvGrpSpPr/>
         <p:nvPr/>
       </p:nvGrpSpPr>
-      <p:grpSpPr/>
+      <p:grpSpPr>
+        <a:xfrm>
+          <a:off x="0" y="0"/>
+          <a:ext cx="0" cy="0"/>
+          <a:chOff x="0" y="0"/>
+          <a:chExt cx="0" cy="0"/>
+        </a:xfrm>
+      </p:grpSpPr>
       <p:sp>
         <p:nvSpPr>
           <p:cNvPr id="2" name="Rectangle 1"/>
@@ -7497,6 +7563,7 @@
           <a:lstStyle/>
           <a:p>
             <a:pPr algn="ctr"/>
+            <a:endParaRPr/>
           </a:p>
         </p:txBody>
       </p:sp>
@@ -7741,7 +7808,7 @@
 </file>
 
 <file path=ppt/slides/slide21.xml><?xml version="1.0" encoding="utf-8"?>
-<p:sld xmlns:a="http://schemas.openxmlformats.org/drawingml/2006/main" xmlns:p="http://schemas.openxmlformats.org/presentationml/2006/main" xmlns:r="http://schemas.openxmlformats.org/officeDocument/2006/relationships">
+<p:sld xmlns:a="http://schemas.openxmlformats.org/drawingml/2006/main" xmlns:r="http://schemas.openxmlformats.org/officeDocument/2006/relationships" xmlns:p="http://schemas.openxmlformats.org/presentationml/2006/main">
   <p:cSld>
     <p:bg>
       <p:bgPr>
@@ -7757,7 +7824,14 @@
         <p:cNvGrpSpPr/>
         <p:nvPr/>
       </p:nvGrpSpPr>
-      <p:grpSpPr/>
+      <p:grpSpPr>
+        <a:xfrm>
+          <a:off x="0" y="0"/>
+          <a:ext cx="0" cy="0"/>
+          <a:chOff x="0" y="0"/>
+          <a:chExt cx="0" cy="0"/>
+        </a:xfrm>
+      </p:grpSpPr>
       <p:sp>
         <p:nvSpPr>
           <p:cNvPr id="2" name="Rectangle 1"/>
@@ -7798,6 +7872,7 @@
           <a:lstStyle/>
           <a:p>
             <a:pPr algn="ctr"/>
+            <a:endParaRPr/>
           </a:p>
         </p:txBody>
       </p:sp>
@@ -7906,7 +7981,7 @@
           </a:fontRef>
         </p:style>
         <p:txBody>
-          <a:bodyPr rtlCol="0" anchor="ctr" lIns="127000" rIns="127000" tIns="101600" bIns="101600"/>
+          <a:bodyPr lIns="127000" tIns="101600" rIns="127000" bIns="101600" rtlCol="0" anchor="ctr"/>
           <a:lstStyle/>
           <a:p>
             <a:pPr algn="ctr"/>
@@ -7970,7 +8045,7 @@
           </a:fontRef>
         </p:style>
         <p:txBody>
-          <a:bodyPr rtlCol="0" anchor="ctr" lIns="127000" rIns="127000" tIns="101600" bIns="101600"/>
+          <a:bodyPr lIns="127000" tIns="101600" rIns="127000" bIns="101600" rtlCol="0" anchor="ctr"/>
           <a:lstStyle/>
           <a:p>
             <a:pPr algn="ctr"/>
@@ -8034,7 +8109,7 @@
           </a:fontRef>
         </p:style>
         <p:txBody>
-          <a:bodyPr rtlCol="0" anchor="ctr" lIns="127000" rIns="127000" tIns="101600" bIns="101600"/>
+          <a:bodyPr lIns="127000" tIns="101600" rIns="127000" bIns="101600" rtlCol="0" anchor="ctr"/>
           <a:lstStyle/>
           <a:p>
             <a:pPr algn="ctr"/>
@@ -8162,7 +8237,7 @@
 </file>
 
 <file path=ppt/slides/slide22.xml><?xml version="1.0" encoding="utf-8"?>
-<p:sld xmlns:a="http://schemas.openxmlformats.org/drawingml/2006/main" xmlns:p="http://schemas.openxmlformats.org/presentationml/2006/main" xmlns:r="http://schemas.openxmlformats.org/officeDocument/2006/relationships">
+<p:sld xmlns:a="http://schemas.openxmlformats.org/drawingml/2006/main" xmlns:r="http://schemas.openxmlformats.org/officeDocument/2006/relationships" xmlns:p="http://schemas.openxmlformats.org/presentationml/2006/main">
   <p:cSld>
     <p:bg>
       <p:bgPr>
@@ -8178,7 +8253,14 @@
         <p:cNvGrpSpPr/>
         <p:nvPr/>
       </p:nvGrpSpPr>
-      <p:grpSpPr/>
+      <p:grpSpPr>
+        <a:xfrm>
+          <a:off x="0" y="0"/>
+          <a:ext cx="0" cy="0"/>
+          <a:chOff x="0" y="0"/>
+          <a:chExt cx="0" cy="0"/>
+        </a:xfrm>
+      </p:grpSpPr>
       <p:sp>
         <p:nvSpPr>
           <p:cNvPr id="2" name="Rectangle 1"/>
@@ -8219,6 +8301,7 @@
           <a:lstStyle/>
           <a:p>
             <a:pPr algn="ctr"/>
+            <a:endParaRPr/>
           </a:p>
         </p:txBody>
       </p:sp>
@@ -8327,7 +8410,7 @@
           </a:fontRef>
         </p:style>
         <p:txBody>
-          <a:bodyPr rtlCol="0" anchor="ctr" lIns="127000" rIns="127000" tIns="101600" bIns="101600"/>
+          <a:bodyPr lIns="127000" tIns="101600" rIns="127000" bIns="101600" rtlCol="0" anchor="ctr"/>
           <a:lstStyle/>
           <a:p>
             <a:pPr algn="ctr"/>
@@ -8489,7 +8572,7 @@
 </file>
 
 <file path=ppt/slides/slide3.xml><?xml version="1.0" encoding="utf-8"?>
-<p:sld xmlns:a="http://schemas.openxmlformats.org/drawingml/2006/main" xmlns:p="http://schemas.openxmlformats.org/presentationml/2006/main" xmlns:r="http://schemas.openxmlformats.org/officeDocument/2006/relationships">
+<p:sld xmlns:a="http://schemas.openxmlformats.org/drawingml/2006/main" xmlns:r="http://schemas.openxmlformats.org/officeDocument/2006/relationships" xmlns:p="http://schemas.openxmlformats.org/presentationml/2006/main">
   <p:cSld>
     <p:bg>
       <p:bgPr>
@@ -8505,7 +8588,14 @@
         <p:cNvGrpSpPr/>
         <p:nvPr/>
       </p:nvGrpSpPr>
-      <p:grpSpPr/>
+      <p:grpSpPr>
+        <a:xfrm>
+          <a:off x="0" y="0"/>
+          <a:ext cx="0" cy="0"/>
+          <a:chOff x="0" y="0"/>
+          <a:chExt cx="0" cy="0"/>
+        </a:xfrm>
+      </p:grpSpPr>
       <p:sp>
         <p:nvSpPr>
           <p:cNvPr id="2" name="Rectangle 1"/>
@@ -8546,6 +8636,7 @@
           <a:lstStyle/>
           <a:p>
             <a:pPr algn="ctr"/>
+            <a:endParaRPr/>
           </a:p>
         </p:txBody>
       </p:sp>
@@ -8654,7 +8745,7 @@
           </a:fontRef>
         </p:style>
         <p:txBody>
-          <a:bodyPr rtlCol="0" anchor="ctr" lIns="127000" rIns="127000" tIns="101600" bIns="101600"/>
+          <a:bodyPr lIns="127000" tIns="101600" rIns="127000" bIns="101600" rtlCol="0" anchor="ctr"/>
           <a:lstStyle/>
           <a:p>
             <a:pPr algn="ctr"/>
@@ -8718,7 +8809,7 @@
           </a:fontRef>
         </p:style>
         <p:txBody>
-          <a:bodyPr rtlCol="0" anchor="ctr" lIns="127000" rIns="127000" tIns="101600" bIns="101600"/>
+          <a:bodyPr lIns="127000" tIns="101600" rIns="127000" bIns="101600" rtlCol="0" anchor="ctr"/>
           <a:lstStyle/>
           <a:p>
             <a:pPr algn="ctr"/>
@@ -8853,7 +8944,7 @@
           </a:fontRef>
         </p:style>
         <p:txBody>
-          <a:bodyPr rtlCol="0" anchor="ctr" lIns="127000" rIns="127000" tIns="101600" bIns="101600"/>
+          <a:bodyPr lIns="127000" tIns="101600" rIns="127000" bIns="101600" rtlCol="0" anchor="ctr"/>
           <a:lstStyle/>
           <a:p>
             <a:pPr algn="ctr"/>
@@ -8922,7 +9013,7 @@
 </file>
 
 <file path=ppt/slides/slide4.xml><?xml version="1.0" encoding="utf-8"?>
-<p:sld xmlns:a="http://schemas.openxmlformats.org/drawingml/2006/main" xmlns:p="http://schemas.openxmlformats.org/presentationml/2006/main" xmlns:r="http://schemas.openxmlformats.org/officeDocument/2006/relationships">
+<p:sld xmlns:a="http://schemas.openxmlformats.org/drawingml/2006/main" xmlns:r="http://schemas.openxmlformats.org/officeDocument/2006/relationships" xmlns:p="http://schemas.openxmlformats.org/presentationml/2006/main">
   <p:cSld>
     <p:bg>
       <p:bgPr>
@@ -8938,7 +9029,14 @@
         <p:cNvGrpSpPr/>
         <p:nvPr/>
       </p:nvGrpSpPr>
-      <p:grpSpPr/>
+      <p:grpSpPr>
+        <a:xfrm>
+          <a:off x="0" y="0"/>
+          <a:ext cx="0" cy="0"/>
+          <a:chOff x="0" y="0"/>
+          <a:chExt cx="0" cy="0"/>
+        </a:xfrm>
+      </p:grpSpPr>
       <p:sp>
         <p:nvSpPr>
           <p:cNvPr id="2" name="Rectangle 1"/>
@@ -8979,6 +9077,7 @@
           <a:lstStyle/>
           <a:p>
             <a:pPr algn="ctr"/>
+            <a:endParaRPr/>
           </a:p>
         </p:txBody>
       </p:sp>
@@ -9087,7 +9186,7 @@
           </a:fontRef>
         </p:style>
         <p:txBody>
-          <a:bodyPr rtlCol="0" anchor="ctr" lIns="127000" rIns="127000" tIns="101600" bIns="101600"/>
+          <a:bodyPr lIns="127000" tIns="101600" rIns="127000" bIns="101600" rtlCol="0" anchor="ctr"/>
           <a:lstStyle/>
           <a:p>
             <a:pPr algn="ctr"/>
@@ -9151,7 +9250,7 @@
           </a:fontRef>
         </p:style>
         <p:txBody>
-          <a:bodyPr rtlCol="0" anchor="ctr" lIns="127000" rIns="127000" tIns="101600" bIns="101600"/>
+          <a:bodyPr lIns="127000" tIns="101600" rIns="127000" bIns="101600" rtlCol="0" anchor="ctr"/>
           <a:lstStyle/>
           <a:p>
             <a:pPr algn="ctr"/>
@@ -9215,7 +9314,7 @@
           </a:fontRef>
         </p:style>
         <p:txBody>
-          <a:bodyPr rtlCol="0" anchor="ctr" lIns="127000" rIns="127000" tIns="101600" bIns="101600"/>
+          <a:bodyPr lIns="127000" tIns="101600" rIns="127000" bIns="101600" rtlCol="0" anchor="ctr"/>
           <a:lstStyle/>
           <a:p>
             <a:pPr algn="ctr"/>
@@ -9279,7 +9378,7 @@
           </a:fontRef>
         </p:style>
         <p:txBody>
-          <a:bodyPr rtlCol="0" anchor="ctr" lIns="127000" rIns="127000" tIns="101600" bIns="101600"/>
+          <a:bodyPr lIns="127000" tIns="101600" rIns="127000" bIns="101600" rtlCol="0" anchor="ctr"/>
           <a:lstStyle/>
           <a:p>
             <a:pPr algn="ctr"/>
@@ -9453,7 +9552,7 @@
 </file>
 
 <file path=ppt/slides/slide5.xml><?xml version="1.0" encoding="utf-8"?>
-<p:sld xmlns:a="http://schemas.openxmlformats.org/drawingml/2006/main" xmlns:p="http://schemas.openxmlformats.org/presentationml/2006/main" xmlns:r="http://schemas.openxmlformats.org/officeDocument/2006/relationships">
+<p:sld xmlns:a="http://schemas.openxmlformats.org/drawingml/2006/main" xmlns:r="http://schemas.openxmlformats.org/officeDocument/2006/relationships" xmlns:p="http://schemas.openxmlformats.org/presentationml/2006/main">
   <p:cSld>
     <p:bg>
       <p:bgPr>
@@ -9469,7 +9568,14 @@
         <p:cNvGrpSpPr/>
         <p:nvPr/>
       </p:nvGrpSpPr>
-      <p:grpSpPr/>
+      <p:grpSpPr>
+        <a:xfrm>
+          <a:off x="0" y="0"/>
+          <a:ext cx="0" cy="0"/>
+          <a:chOff x="0" y="0"/>
+          <a:chExt cx="0" cy="0"/>
+        </a:xfrm>
+      </p:grpSpPr>
       <p:sp>
         <p:nvSpPr>
           <p:cNvPr id="2" name="Rectangle 1"/>
@@ -9510,6 +9616,7 @@
           <a:lstStyle/>
           <a:p>
             <a:pPr algn="ctr"/>
+            <a:endParaRPr/>
           </a:p>
         </p:txBody>
       </p:sp>
@@ -9618,7 +9725,7 @@
           </a:fontRef>
         </p:style>
         <p:txBody>
-          <a:bodyPr rtlCol="0" anchor="ctr" lIns="127000" rIns="127000" tIns="101600" bIns="101600"/>
+          <a:bodyPr lIns="127000" tIns="101600" rIns="127000" bIns="101600" rtlCol="0" anchor="ctr"/>
           <a:lstStyle/>
           <a:p>
             <a:pPr algn="ctr"/>
@@ -9682,7 +9789,7 @@
           </a:fontRef>
         </p:style>
         <p:txBody>
-          <a:bodyPr rtlCol="0" anchor="ctr" lIns="127000" rIns="127000" tIns="101600" bIns="101600"/>
+          <a:bodyPr lIns="127000" tIns="101600" rIns="127000" bIns="101600" rtlCol="0" anchor="ctr"/>
           <a:lstStyle/>
           <a:p>
             <a:pPr algn="ctr"/>
@@ -9746,7 +9853,7 @@
           </a:fontRef>
         </p:style>
         <p:txBody>
-          <a:bodyPr rtlCol="0" anchor="ctr" lIns="127000" rIns="127000" tIns="101600" bIns="101600"/>
+          <a:bodyPr lIns="127000" tIns="101600" rIns="127000" bIns="101600" rtlCol="0" anchor="ctr"/>
           <a:lstStyle/>
           <a:p>
             <a:pPr algn="ctr"/>
@@ -9810,7 +9917,7 @@
           </a:fontRef>
         </p:style>
         <p:txBody>
-          <a:bodyPr rtlCol="0" anchor="ctr" lIns="127000" rIns="127000" tIns="101600" bIns="101600"/>
+          <a:bodyPr lIns="127000" tIns="101600" rIns="127000" bIns="101600" rtlCol="0" anchor="ctr"/>
           <a:lstStyle/>
           <a:p>
             <a:pPr algn="ctr"/>
@@ -9945,7 +10052,7 @@
           </a:fontRef>
         </p:style>
         <p:txBody>
-          <a:bodyPr rtlCol="0" anchor="ctr" lIns="127000" rIns="127000" tIns="101600" bIns="101600"/>
+          <a:bodyPr lIns="127000" tIns="101600" rIns="127000" bIns="101600" rtlCol="0" anchor="ctr"/>
           <a:lstStyle/>
           <a:p>
             <a:pPr algn="ctr"/>
@@ -10014,7 +10121,7 @@
 </file>
 
 <file path=ppt/slides/slide6.xml><?xml version="1.0" encoding="utf-8"?>
-<p:sld xmlns:a="http://schemas.openxmlformats.org/drawingml/2006/main" xmlns:p="http://schemas.openxmlformats.org/presentationml/2006/main" xmlns:r="http://schemas.openxmlformats.org/officeDocument/2006/relationships">
+<p:sld xmlns:a="http://schemas.openxmlformats.org/drawingml/2006/main" xmlns:r="http://schemas.openxmlformats.org/officeDocument/2006/relationships" xmlns:p="http://schemas.openxmlformats.org/presentationml/2006/main">
   <p:cSld>
     <p:bg>
       <p:bgPr>
@@ -10030,7 +10137,14 @@
         <p:cNvGrpSpPr/>
         <p:nvPr/>
       </p:nvGrpSpPr>
-      <p:grpSpPr/>
+      <p:grpSpPr>
+        <a:xfrm>
+          <a:off x="0" y="0"/>
+          <a:ext cx="0" cy="0"/>
+          <a:chOff x="0" y="0"/>
+          <a:chExt cx="0" cy="0"/>
+        </a:xfrm>
+      </p:grpSpPr>
       <p:sp>
         <p:nvSpPr>
           <p:cNvPr id="2" name="Rectangle 1"/>
@@ -10071,6 +10185,7 @@
           <a:lstStyle/>
           <a:p>
             <a:pPr algn="ctr"/>
+            <a:endParaRPr/>
           </a:p>
         </p:txBody>
       </p:sp>
@@ -10203,7 +10318,7 @@
           </a:fontRef>
         </p:style>
         <p:txBody>
-          <a:bodyPr rtlCol="0" anchor="ctr" lIns="127000" rIns="127000" tIns="101600" bIns="101600"/>
+          <a:bodyPr lIns="127000" tIns="101600" rIns="127000" bIns="101600" rtlCol="0" anchor="ctr"/>
           <a:lstStyle/>
           <a:p>
             <a:pPr algn="ctr"/>
@@ -10267,7 +10382,7 @@
           </a:fontRef>
         </p:style>
         <p:txBody>
-          <a:bodyPr rtlCol="0" anchor="ctr" lIns="127000" rIns="127000" tIns="101600" bIns="101600"/>
+          <a:bodyPr lIns="127000" tIns="101600" rIns="127000" bIns="101600" rtlCol="0" anchor="ctr"/>
           <a:lstStyle/>
           <a:p>
             <a:pPr algn="ctr"/>
@@ -10383,7 +10498,7 @@
 </file>
 
 <file path=ppt/slides/slide7.xml><?xml version="1.0" encoding="utf-8"?>
-<p:sld xmlns:a="http://schemas.openxmlformats.org/drawingml/2006/main" xmlns:p="http://schemas.openxmlformats.org/presentationml/2006/main" xmlns:r="http://schemas.openxmlformats.org/officeDocument/2006/relationships">
+<p:sld xmlns:a="http://schemas.openxmlformats.org/drawingml/2006/main" xmlns:r="http://schemas.openxmlformats.org/officeDocument/2006/relationships" xmlns:p="http://schemas.openxmlformats.org/presentationml/2006/main">
   <p:cSld>
     <p:bg>
       <p:bgPr>
@@ -10399,7 +10514,14 @@
         <p:cNvGrpSpPr/>
         <p:nvPr/>
       </p:nvGrpSpPr>
-      <p:grpSpPr/>
+      <p:grpSpPr>
+        <a:xfrm>
+          <a:off x="0" y="0"/>
+          <a:ext cx="0" cy="0"/>
+          <a:chOff x="0" y="0"/>
+          <a:chExt cx="0" cy="0"/>
+        </a:xfrm>
+      </p:grpSpPr>
       <p:sp>
         <p:nvSpPr>
           <p:cNvPr id="2" name="Rectangle 1"/>
@@ -10440,6 +10562,7 @@
           <a:lstStyle/>
           <a:p>
             <a:pPr algn="ctr"/>
+            <a:endParaRPr/>
           </a:p>
         </p:txBody>
       </p:sp>
@@ -10631,7 +10754,7 @@
           </a:fontRef>
         </p:style>
         <p:txBody>
-          <a:bodyPr rtlCol="0" anchor="ctr" lIns="127000" rIns="127000" tIns="101600" bIns="101600"/>
+          <a:bodyPr lIns="127000" tIns="101600" rIns="127000" bIns="101600" rtlCol="0" anchor="ctr"/>
           <a:lstStyle/>
           <a:p>
             <a:pPr algn="ctr"/>
@@ -10700,7 +10823,7 @@
 </file>
 
 <file path=ppt/slides/slide8.xml><?xml version="1.0" encoding="utf-8"?>
-<p:sld xmlns:a="http://schemas.openxmlformats.org/drawingml/2006/main" xmlns:p="http://schemas.openxmlformats.org/presentationml/2006/main" xmlns:r="http://schemas.openxmlformats.org/officeDocument/2006/relationships">
+<p:sld xmlns:a="http://schemas.openxmlformats.org/drawingml/2006/main" xmlns:r="http://schemas.openxmlformats.org/officeDocument/2006/relationships" xmlns:p="http://schemas.openxmlformats.org/presentationml/2006/main">
   <p:cSld>
     <p:bg>
       <p:bgPr>
@@ -10716,7 +10839,14 @@
         <p:cNvGrpSpPr/>
         <p:nvPr/>
       </p:nvGrpSpPr>
-      <p:grpSpPr/>
+      <p:grpSpPr>
+        <a:xfrm>
+          <a:off x="0" y="0"/>
+          <a:ext cx="0" cy="0"/>
+          <a:chOff x="0" y="0"/>
+          <a:chExt cx="0" cy="0"/>
+        </a:xfrm>
+      </p:grpSpPr>
       <p:sp>
         <p:nvSpPr>
           <p:cNvPr id="2" name="Rectangle 1"/>
@@ -10757,6 +10887,7 @@
           <a:lstStyle/>
           <a:p>
             <a:pPr algn="ctr"/>
+            <a:endParaRPr/>
           </a:p>
         </p:txBody>
       </p:sp>
@@ -10948,7 +11079,7 @@
           </a:fontRef>
         </p:style>
         <p:txBody>
-          <a:bodyPr rtlCol="0" anchor="ctr" lIns="127000" rIns="127000" tIns="101600" bIns="101600"/>
+          <a:bodyPr lIns="127000" tIns="101600" rIns="127000" bIns="101600" rtlCol="0" anchor="ctr"/>
           <a:lstStyle/>
           <a:p>
             <a:pPr algn="ctr"/>
@@ -11017,7 +11148,7 @@
 </file>
 
 <file path=ppt/slides/slide9.xml><?xml version="1.0" encoding="utf-8"?>
-<p:sld xmlns:a="http://schemas.openxmlformats.org/drawingml/2006/main" xmlns:p="http://schemas.openxmlformats.org/presentationml/2006/main" xmlns:r="http://schemas.openxmlformats.org/officeDocument/2006/relationships">
+<p:sld xmlns:a="http://schemas.openxmlformats.org/drawingml/2006/main" xmlns:r="http://schemas.openxmlformats.org/officeDocument/2006/relationships" xmlns:p="http://schemas.openxmlformats.org/presentationml/2006/main">
   <p:cSld>
     <p:bg>
       <p:bgPr>
@@ -11033,7 +11164,14 @@
         <p:cNvGrpSpPr/>
         <p:nvPr/>
       </p:nvGrpSpPr>
-      <p:grpSpPr/>
+      <p:grpSpPr>
+        <a:xfrm>
+          <a:off x="0" y="0"/>
+          <a:ext cx="0" cy="0"/>
+          <a:chOff x="0" y="0"/>
+          <a:chExt cx="0" cy="0"/>
+        </a:xfrm>
+      </p:grpSpPr>
       <p:sp>
         <p:nvSpPr>
           <p:cNvPr id="2" name="Rectangle 1"/>
@@ -11074,6 +11212,7 @@
           <a:lstStyle/>
           <a:p>
             <a:pPr algn="ctr"/>
+            <a:endParaRPr/>
           </a:p>
         </p:txBody>
       </p:sp>
@@ -11265,7 +11404,7 @@
           </a:fontRef>
         </p:style>
         <p:txBody>
-          <a:bodyPr rtlCol="0" anchor="ctr" lIns="127000" rIns="127000" tIns="101600" bIns="101600"/>
+          <a:bodyPr lIns="127000" tIns="101600" rIns="127000" bIns="101600" rtlCol="0" anchor="ctr"/>
           <a:lstStyle/>
           <a:p>
             <a:pPr algn="ctr"/>
